--- a/modules/16-reporting/slides.pptx
+++ b/modules/16-reporting/slides.pptx
@@ -3446,7 +3446,7 @@
             <a:pPr lvl="0" algn="r" rtl="1"/>
             <a:r>
               <a:rPr/>
-              <a:t>ממצא: תיאור→השפעה→PoC→תיקון; CVSS</a:t>
+              <a:t>ממצא: תיאור → השפעה → PoC → תיקון; CVSS</a:t>
             </a:r>
           </a:p>
           <a:p>
